--- a/dataset/guides_final/SW/manual/IT-SW-003-M_SW 실행·오류 처리 매뉴얼.pptx
+++ b/dataset/guides_final/SW/manual/IT-SW-003-M_SW 실행·오류 처리 매뉴얼.pptx
@@ -29071,7 +29071,7 @@
                 <a:ea typeface="Malgun Gothic"/>
                 <a:cs typeface="Malgun Gothic"/>
               </a:rPr>
-              <a:t>티켓: 담당자 조치가 필요한 건. 담당 팀에 배정하고 상태를 RDY → IP → FIN → CLS 로 관리한다. FIN은 담당자 처리 완료, CLS는 문의자가 해결을 확인한 최종</a:t>
+              <a:t>티켓: 담당자 조치가 필요한 건. 담당 팀에 배정하고 상태를 RDY → WIP → FIN → CLS 로 관리한다. FIN은 담당자 처리 완료, CLS는 문의자가 해결을 확인한 최종</a:t>
             </a:r>
           </a:p>
           <a:p>

--- a/dataset/guides_final/SW/manual/IT-SW-003-M_SW 실행·오류 처리 매뉴얼.pptx
+++ b/dataset/guides_final/SW/manual/IT-SW-003-M_SW 실행·오류 처리 매뉴얼.pptx
@@ -3236,7 +3236,7 @@
                 <a:ea typeface="Malgun Gothic"/>
                 <a:cs typeface="Malgun Gothic"/>
               </a:rPr>
-              <a:t>한화시스템 ICT IT 담당자 매뉴얼 · SW·라이선스</a:t>
+              <a:t>가상 ICT 기업 IT 담당자 매뉴얼 · SW·라이선스</a:t>
             </a:r>
           </a:p>
         </p:txBody>
@@ -3515,7 +3515,7 @@
                 <a:ea typeface="Malgun Gothic"/>
                 <a:cs typeface="Malgun Gothic"/>
               </a:rPr>
-              <a:t>© HANWHA SYSTEMS ICT · IT-SW-003-M · 사내 제한</a:t>
+              <a:t>© 가상 ICT 기업 · IT-SW-003-M · 사내 제한</a:t>
             </a:r>
           </a:p>
         </p:txBody>
@@ -4440,7 +4440,7 @@
                 <a:ea typeface="Malgun Gothic"/>
                 <a:cs typeface="Malgun Gothic"/>
               </a:rPr>
-              <a:t>© HANWHA SYSTEMS ICT · IT-SW-003-M · 사내 제한</a:t>
+              <a:t>© 가상 ICT 기업 · IT-SW-003-M · 사내 제한</a:t>
             </a:r>
           </a:p>
         </p:txBody>
@@ -7380,7 +7380,7 @@
                 <a:ea typeface="Malgun Gothic"/>
                 <a:cs typeface="Malgun Gothic"/>
               </a:rPr>
-              <a:t>© HANWHA SYSTEMS ICT · IT-SW-003-M · 사내 제한</a:t>
+              <a:t>© 가상 ICT 기업 · IT-SW-003-M · 사내 제한</a:t>
             </a:r>
           </a:p>
         </p:txBody>
@@ -10202,7 +10202,7 @@
                 <a:ea typeface="Malgun Gothic"/>
                 <a:cs typeface="Malgun Gothic"/>
               </a:rPr>
-              <a:t>© HANWHA SYSTEMS ICT · IT-SW-003-M · 사내 제한</a:t>
+              <a:t>© 가상 ICT 기업 · IT-SW-003-M · 사내 제한</a:t>
             </a:r>
           </a:p>
         </p:txBody>
@@ -12782,7 +12782,7 @@
                 <a:ea typeface="Malgun Gothic"/>
                 <a:cs typeface="Malgun Gothic"/>
               </a:rPr>
-              <a:t>© HANWHA SYSTEMS ICT · IT-SW-003-M · 사내 제한</a:t>
+              <a:t>© 가상 ICT 기업 · IT-SW-003-M · 사내 제한</a:t>
             </a:r>
           </a:p>
         </p:txBody>
@@ -13707,7 +13707,7 @@
                 <a:ea typeface="Malgun Gothic"/>
                 <a:cs typeface="Malgun Gothic"/>
               </a:rPr>
-              <a:t>© HANWHA SYSTEMS ICT · IT-SW-003-M · 사내 제한</a:t>
+              <a:t>© 가상 ICT 기업 · IT-SW-003-M · 사내 제한</a:t>
             </a:r>
           </a:p>
         </p:txBody>
@@ -16413,7 +16413,7 @@
                 <a:ea typeface="Malgun Gothic"/>
                 <a:cs typeface="Malgun Gothic"/>
               </a:rPr>
-              <a:t>© HANWHA SYSTEMS ICT · IT-SW-003-M · 사내 제한</a:t>
+              <a:t>© 가상 ICT 기업 · IT-SW-003-M · 사내 제한</a:t>
             </a:r>
           </a:p>
         </p:txBody>
@@ -17518,7 +17518,7 @@
                 <a:ea typeface="Malgun Gothic"/>
                 <a:cs typeface="Malgun Gothic"/>
               </a:rPr>
-              <a:t>© HANWHA SYSTEMS ICT · IT-SW-003-M · 사내 제한</a:t>
+              <a:t>© 가상 ICT 기업 · IT-SW-003-M · 사내 제한</a:t>
             </a:r>
           </a:p>
         </p:txBody>
@@ -17766,7 +17766,7 @@
                 <a:ea typeface="Malgun Gothic"/>
                 <a:cs typeface="Malgun Gothic"/>
               </a:rPr>
-              <a:t>© HANWHA SYSTEMS ICT · IT-SW-003-M · 사내 제한</a:t>
+              <a:t>© 가상 ICT 기업 · IT-SW-003-M · 사내 제한</a:t>
             </a:r>
           </a:p>
         </p:txBody>
@@ -18449,7 +18449,7 @@
                 <a:ea typeface="Malgun Gothic"/>
                 <a:cs typeface="Malgun Gothic"/>
               </a:rPr>
-              <a:t>© HANWHA SYSTEMS ICT · IT-SW-003-M · 사내 제한</a:t>
+              <a:t>© 가상 ICT 기업 · IT-SW-003-M · 사내 제한</a:t>
             </a:r>
           </a:p>
         </p:txBody>
@@ -18697,7 +18697,7 @@
                 <a:ea typeface="Malgun Gothic"/>
                 <a:cs typeface="Malgun Gothic"/>
               </a:rPr>
-              <a:t>© HANWHA SYSTEMS ICT · IT-SW-003-M · 사내 제한</a:t>
+              <a:t>© 가상 ICT 기업 · IT-SW-003-M · 사내 제한</a:t>
             </a:r>
           </a:p>
         </p:txBody>
@@ -20340,7 +20340,7 @@
                 <a:ea typeface="Malgun Gothic"/>
                 <a:cs typeface="Malgun Gothic"/>
               </a:rPr>
-              <a:t>© HANWHA SYSTEMS ICT · IT-SW-003-M · 사내 제한</a:t>
+              <a:t>© 가상 ICT 기업 · IT-SW-003-M · 사내 제한</a:t>
             </a:r>
           </a:p>
         </p:txBody>
@@ -21368,7 +21368,7 @@
                 <a:ea typeface="Malgun Gothic"/>
                 <a:cs typeface="Malgun Gothic"/>
               </a:rPr>
-              <a:t>© HANWHA SYSTEMS ICT · IT-SW-003-M · 사내 제한</a:t>
+              <a:t>© 가상 ICT 기업 · IT-SW-003-M · 사내 제한</a:t>
             </a:r>
           </a:p>
         </p:txBody>
@@ -21616,7 +21616,7 @@
                 <a:ea typeface="Malgun Gothic"/>
                 <a:cs typeface="Malgun Gothic"/>
               </a:rPr>
-              <a:t>© HANWHA SYSTEMS ICT · IT-SW-003-M · 사내 제한</a:t>
+              <a:t>© 가상 ICT 기업 · IT-SW-003-M · 사내 제한</a:t>
             </a:r>
           </a:p>
         </p:txBody>
@@ -22928,7 +22928,7 @@
                 <a:ea typeface="Malgun Gothic"/>
                 <a:cs typeface="Malgun Gothic"/>
               </a:rPr>
-              <a:t>© HANWHA SYSTEMS ICT · IT-SW-003-M · 사내 제한</a:t>
+              <a:t>© 가상 ICT 기업 · IT-SW-003-M · 사내 제한</a:t>
             </a:r>
           </a:p>
         </p:txBody>
@@ -23636,7 +23636,7 @@
                 <a:ea typeface="Malgun Gothic"/>
                 <a:cs typeface="Malgun Gothic"/>
               </a:rPr>
-              <a:t>© HANWHA SYSTEMS ICT · IT-SW-003-M · 사내 제한</a:t>
+              <a:t>© 가상 ICT 기업 · IT-SW-003-M · 사내 제한</a:t>
             </a:r>
           </a:p>
         </p:txBody>
@@ -24782,7 +24782,7 @@
                 <a:ea typeface="Malgun Gothic"/>
                 <a:cs typeface="Malgun Gothic"/>
               </a:rPr>
-              <a:t>© HANWHA SYSTEMS ICT · IT-SW-003-M · 사내 제한</a:t>
+              <a:t>© 가상 ICT 기업 · IT-SW-003-M · 사내 제한</a:t>
             </a:r>
           </a:p>
         </p:txBody>
@@ -25030,7 +25030,7 @@
                 <a:ea typeface="Malgun Gothic"/>
                 <a:cs typeface="Malgun Gothic"/>
               </a:rPr>
-              <a:t>© HANWHA SYSTEMS ICT · IT-SW-003-M · 사내 제한</a:t>
+              <a:t>© 가상 ICT 기업 · IT-SW-003-M · 사내 제한</a:t>
             </a:r>
           </a:p>
         </p:txBody>
@@ -25952,7 +25952,7 @@
                 <a:ea typeface="Malgun Gothic"/>
                 <a:cs typeface="Malgun Gothic"/>
               </a:rPr>
-              <a:t>© HANWHA SYSTEMS ICT · IT-SW-003-M · 사내 제한</a:t>
+              <a:t>© 가상 ICT 기업 · IT-SW-003-M · 사내 제한</a:t>
             </a:r>
           </a:p>
         </p:txBody>
@@ -26200,7 +26200,7 @@
                 <a:ea typeface="Malgun Gothic"/>
                 <a:cs typeface="Malgun Gothic"/>
               </a:rPr>
-              <a:t>© HANWHA SYSTEMS ICT · IT-SW-003-M · 사내 제한</a:t>
+              <a:t>© 가상 ICT 기업 · IT-SW-003-M · 사내 제한</a:t>
             </a:r>
           </a:p>
         </p:txBody>
@@ -29471,7 +29471,7 @@
                 <a:ea typeface="Malgun Gothic"/>
                 <a:cs typeface="Malgun Gothic"/>
               </a:rPr>
-              <a:t>© HANWHA SYSTEMS ICT · IT-SW-003-M · 사내 제한</a:t>
+              <a:t>© 가상 ICT 기업 · IT-SW-003-M · 사내 제한</a:t>
             </a:r>
           </a:p>
         </p:txBody>
@@ -29719,7 +29719,7 @@
                 <a:ea typeface="Malgun Gothic"/>
                 <a:cs typeface="Malgun Gothic"/>
               </a:rPr>
-              <a:t>© HANWHA SYSTEMS ICT · IT-SW-003-M · 사내 제한</a:t>
+              <a:t>© 가상 ICT 기업 · IT-SW-003-M · 사내 제한</a:t>
             </a:r>
           </a:p>
         </p:txBody>
@@ -32299,7 +32299,7 @@
                 <a:ea typeface="Malgun Gothic"/>
                 <a:cs typeface="Malgun Gothic"/>
               </a:rPr>
-              <a:t>© HANWHA SYSTEMS ICT · IT-SW-003-M · 사내 제한</a:t>
+              <a:t>© 가상 ICT 기업 · IT-SW-003-M · 사내 제한</a:t>
             </a:r>
           </a:p>
         </p:txBody>
